--- a/PowerPoints/09 - Constraint Analysis.pptx
+++ b/PowerPoints/09 - Constraint Analysis.pptx
@@ -1666,7 +1666,7 @@
           <a:bodyPr/>
           <a:lstStyle/>
           <a:p>
-            <a:endParaRPr lang="en-US" dirty="0"/>
+            <a:endParaRPr lang="en-US"/>
           </a:p>
         </p:txBody>
       </p:sp>
@@ -6268,23 +6268,23 @@
           <a:p>
             <a:pPr lvl="2"/>
             <a:r>
-              <a:rPr lang="en-US" dirty="0"/>
-              <a:t> Use AST method </a:t>
-            </a:r>
-            <a:r>
-              <a:rPr lang="en-US" dirty="0" err="1">
+              <a:rPr lang="en-US" sz="1750" dirty="0"/>
+              <a:t>Use AST method </a:t>
+            </a:r>
+            <a:r>
+              <a:rPr lang="en-US" sz="1750" dirty="0" err="1">
                 <a:latin typeface="Consolas" panose="020B0609020204030204" pitchFamily="49" charset="0"/>
               </a:rPr>
               <a:t>matchTypes</a:t>
             </a:r>
             <a:r>
-              <a:rPr lang="en-US" dirty="0">
+              <a:rPr lang="en-US" sz="1750" dirty="0">
                 <a:latin typeface="Consolas" panose="020B0609020204030204" pitchFamily="49" charset="0"/>
               </a:rPr>
               <a:t>()</a:t>
             </a:r>
             <a:r>
-              <a:rPr lang="en-US" dirty="0"/>
+              <a:rPr lang="en-US" sz="1750" dirty="0"/>
               <a:t> to check assignment compatibility.</a:t>
             </a:r>
           </a:p>
@@ -6460,60 +6460,60 @@
           <a:p>
             <a:pPr lvl="2"/>
             <a:r>
-              <a:rPr lang="en-US" dirty="0"/>
+              <a:rPr lang="en-US" sz="1750" dirty="0"/>
               <a:t>Object </a:t>
             </a:r>
             <a:r>
-              <a:rPr lang="en-US" dirty="0" err="1">
+              <a:rPr lang="en-US" sz="1750" dirty="0" err="1">
                 <a:latin typeface="Consolas" panose="020B0609020204030204" pitchFamily="49" charset="0"/>
               </a:rPr>
               <a:t>IntUtil</a:t>
             </a:r>
             <a:r>
-              <a:rPr lang="en-US" dirty="0"/>
+              <a:rPr lang="en-US" sz="1750" dirty="0"/>
               <a:t> in package </a:t>
             </a:r>
             <a:r>
-              <a:rPr lang="en-US" dirty="0" err="1">
-                <a:latin typeface="Consolas" panose="020B0609020204030204" pitchFamily="49" charset="0"/>
-              </a:rPr>
-              <a:t>edu.citadel.common</a:t>
-            </a:r>
-            <a:r>
-              <a:rPr lang="en-US" dirty="0"/>
+              <a:rPr lang="en-US" sz="1750" dirty="0" err="1">
+                <a:latin typeface="Consolas" panose="020B0609020204030204" pitchFamily="49" charset="0"/>
+              </a:rPr>
+              <a:t>edu.citadel.common.util</a:t>
+            </a:r>
+            <a:r>
+              <a:rPr lang="en-US" sz="1750" dirty="0"/>
               <a:t> has a method named </a:t>
             </a:r>
             <a:r>
-              <a:rPr lang="en-US" dirty="0" err="1">
+              <a:rPr lang="en-US" sz="1750" dirty="0" err="1">
                 <a:latin typeface="Consolas" panose="020B0609020204030204" pitchFamily="49" charset="0"/>
               </a:rPr>
               <a:t>toInt</a:t>
             </a:r>
             <a:r>
-              <a:rPr lang="en-US" dirty="0">
+              <a:rPr lang="en-US" sz="1750" dirty="0">
                 <a:latin typeface="Consolas" panose="020B0609020204030204" pitchFamily="49" charset="0"/>
               </a:rPr>
               <a:t>()</a:t>
             </a:r>
             <a:r>
-              <a:rPr lang="en-US" dirty="0"/>
+              <a:rPr lang="en-US" sz="1750" dirty="0"/>
               <a:t> that can be used to check this.</a:t>
             </a:r>
           </a:p>
           <a:p>
             <a:pPr lvl="2"/>
             <a:r>
-              <a:rPr lang="en-US" dirty="0"/>
+              <a:rPr lang="en-US" sz="1750" dirty="0"/>
               <a:t>If the check fails, set the literal’s value to a valid value for type </a:t>
             </a:r>
             <a:r>
-              <a:rPr lang="en-US" dirty="0">
+              <a:rPr lang="en-US" sz="1750" dirty="0">
                 <a:latin typeface="Consolas" panose="020B0609020204030204" pitchFamily="49" charset="0"/>
               </a:rPr>
               <a:t>Integer</a:t>
             </a:r>
             <a:r>
-              <a:rPr lang="en-US" dirty="0"/>
+              <a:rPr lang="en-US" sz="1750" dirty="0"/>
               <a:t> in order to prevent additional error messages.</a:t>
             </a:r>
           </a:p>
@@ -7224,35 +7224,58 @@
           </a:p>
           <a:p>
             <a:r>
-              <a:rPr lang="en-US" sz="2200" dirty="0">
-                <a:latin typeface="Consolas" panose="020B0609020204030204" pitchFamily="49" charset="0"/>
-              </a:rPr>
-              <a:t>Program</a:t>
-            </a:r>
+              <a:rPr lang="en-US" sz="2200" dirty="0" err="1">
+                <a:latin typeface="Consolas" panose="020B0609020204030204" pitchFamily="49" charset="0"/>
+              </a:rPr>
+              <a:t>OutputStmt</a:t>
+            </a:r>
+            <a:endParaRPr lang="en-US" sz="2200" dirty="0">
+              <a:latin typeface="Consolas" panose="020B0609020204030204" pitchFamily="49" charset="0"/>
+            </a:endParaRPr>
           </a:p>
           <a:p>
             <a:pPr lvl="1"/>
             <a:r>
               <a:rPr lang="en-US" sz="1900" dirty="0"/>
-              <a:t>Miscellaneous Rule: A program must contain a </a:t>
+              <a:t>Type Rule: Each expression must have type </a:t>
+            </a:r>
+            <a:r>
+              <a:rPr lang="en-US" sz="1900" dirty="0">
+                <a:latin typeface="Consolas" panose="020B0609020204030204" pitchFamily="49" charset="0"/>
+              </a:rPr>
+              <a:t>Integer</a:t>
+            </a:r>
+            <a:r>
+              <a:rPr lang="en-US" sz="1900" dirty="0"/>
+              <a:t>, </a:t>
+            </a:r>
+            <a:r>
+              <a:rPr lang="en-US" sz="1900" dirty="0">
+                <a:latin typeface="Consolas" panose="020B0609020204030204" pitchFamily="49" charset="0"/>
+              </a:rPr>
+              <a:t>Char</a:t>
+            </a:r>
+            <a:r>
+              <a:rPr lang="en-US" sz="1900" dirty="0"/>
+              <a:t>, </a:t>
+            </a:r>
+            <a:r>
+              <a:rPr lang="en-US" sz="1900" dirty="0">
+                <a:latin typeface="Consolas" panose="020B0609020204030204" pitchFamily="49" charset="0"/>
+              </a:rPr>
+              <a:t>Boolean</a:t>
+            </a:r>
+            <a:r>
+              <a:rPr lang="en-US" sz="1900" dirty="0"/>
+              <a:t>, or a string type.  Output is supported only for integers, characters, </a:t>
             </a:r>
             <a:r>
               <a:rPr lang="en-US" sz="1900" dirty="0" err="1"/>
-              <a:t>parameterless</a:t>
+              <a:t>booleans</a:t>
             </a:r>
             <a:r>
               <a:rPr lang="en-US" sz="1900" dirty="0"/>
-              <a:t> procedure named </a:t>
-            </a:r>
-            <a:r>
-              <a:rPr lang="en-US" sz="1900" dirty="0">
-                <a:latin typeface="Consolas" panose="020B0609020204030204" pitchFamily="49" charset="0"/>
-              </a:rPr>
-              <a:t>main()</a:t>
-            </a:r>
-            <a:r>
-              <a:rPr lang="en-US" sz="1900" dirty="0"/>
-              <a:t>.</a:t>
+              <a:t>, and strings.</a:t>
             </a:r>
           </a:p>
         </p:txBody>
@@ -7388,58 +7411,35 @@
           <a:lstStyle/>
           <a:p>
             <a:r>
-              <a:rPr lang="en-US" sz="2200" dirty="0" err="1">
-                <a:latin typeface="Consolas" panose="020B0609020204030204" pitchFamily="49" charset="0"/>
-              </a:rPr>
-              <a:t>OutputStmt</a:t>
-            </a:r>
-            <a:endParaRPr lang="en-US" sz="2200" dirty="0">
-              <a:latin typeface="Consolas" panose="020B0609020204030204" pitchFamily="49" charset="0"/>
-            </a:endParaRPr>
+              <a:rPr lang="en-US" sz="2200" dirty="0">
+                <a:latin typeface="Consolas" panose="020B0609020204030204" pitchFamily="49" charset="0"/>
+              </a:rPr>
+              <a:t>Program</a:t>
+            </a:r>
           </a:p>
           <a:p>
             <a:pPr lvl="1"/>
             <a:r>
               <a:rPr lang="en-US" sz="1900" dirty="0"/>
-              <a:t>Type Rule: Each expression must have type </a:t>
+              <a:t>Miscellaneous Rule: A program must contain a </a:t>
+            </a:r>
+            <a:r>
+              <a:rPr lang="en-US" sz="1900" dirty="0" err="1"/>
+              <a:t>parameterless</a:t>
+            </a:r>
+            <a:r>
+              <a:rPr lang="en-US" sz="1900" dirty="0"/>
+              <a:t> procedure named </a:t>
             </a:r>
             <a:r>
               <a:rPr lang="en-US" sz="1900" dirty="0">
                 <a:latin typeface="Consolas" panose="020B0609020204030204" pitchFamily="49" charset="0"/>
               </a:rPr>
-              <a:t>Integer</a:t>
+              <a:t>main()</a:t>
             </a:r>
             <a:r>
               <a:rPr lang="en-US" sz="1900" dirty="0"/>
-              <a:t>, </a:t>
-            </a:r>
-            <a:r>
-              <a:rPr lang="en-US" sz="1900" dirty="0">
-                <a:latin typeface="Consolas" panose="020B0609020204030204" pitchFamily="49" charset="0"/>
-              </a:rPr>
-              <a:t>Char</a:t>
-            </a:r>
-            <a:r>
-              <a:rPr lang="en-US" sz="1900" dirty="0"/>
-              <a:t>, </a:t>
-            </a:r>
-            <a:r>
-              <a:rPr lang="en-US" sz="1900" dirty="0">
-                <a:latin typeface="Consolas" panose="020B0609020204030204" pitchFamily="49" charset="0"/>
-              </a:rPr>
-              <a:t>Boolean</a:t>
-            </a:r>
-            <a:r>
-              <a:rPr lang="en-US" sz="1900" dirty="0"/>
-              <a:t>, or a string type.  Output is supported only for integers, characters, </a:t>
-            </a:r>
-            <a:r>
-              <a:rPr lang="en-US" sz="1900" dirty="0" err="1"/>
-              <a:t>booleans</a:t>
-            </a:r>
-            <a:r>
-              <a:rPr lang="en-US" sz="1900" dirty="0"/>
-              <a:t>, and strings.</a:t>
+              <a:t>.</a:t>
             </a:r>
           </a:p>
           <a:p>
@@ -7893,32 +7893,70 @@
           <a:p>
             <a:pPr lvl="2"/>
             <a:r>
-              <a:rPr lang="en-US" dirty="0"/>
-              <a:t>For CPRL/0, method </a:t>
-            </a:r>
-            <a:r>
-              <a:rPr lang="en-US" dirty="0" err="1"/>
+              <a:rPr lang="en-US" sz="1750" dirty="0"/>
+              <a:t>For CPRL/</a:t>
+            </a:r>
+            <a:r>
+              <a:rPr lang="en-US" sz="1750" dirty="0">
+                <a:latin typeface="Consolas" panose="020B0609020204030204" pitchFamily="49" charset="0"/>
+              </a:rPr>
+              <a:t>0</a:t>
+            </a:r>
+            <a:r>
+              <a:rPr lang="en-US" sz="1750" dirty="0"/>
+              <a:t>, method </a:t>
+            </a:r>
+            <a:r>
+              <a:rPr lang="en-US" sz="1750" dirty="0" err="1">
+                <a:latin typeface="Consolas" panose="020B0609020204030204" pitchFamily="49" charset="0"/>
+              </a:rPr>
               <a:t>matchTypes</a:t>
             </a:r>
             <a:r>
-              <a:rPr lang="en-US" dirty="0"/>
-              <a:t>() in class AST can be used to check for assignment compatibility.  But method </a:t>
-            </a:r>
-            <a:r>
-              <a:rPr lang="en-US" dirty="0" err="1"/>
+              <a:rPr lang="en-US" sz="1750" dirty="0">
+                <a:latin typeface="Consolas" panose="020B0609020204030204" pitchFamily="49" charset="0"/>
+              </a:rPr>
+              <a:t>()</a:t>
+            </a:r>
+            <a:r>
+              <a:rPr lang="en-US" sz="1750" dirty="0"/>
+              <a:t> in class </a:t>
+            </a:r>
+            <a:r>
+              <a:rPr lang="en-US" sz="1750" dirty="0">
+                <a:latin typeface="Consolas" panose="020B0609020204030204" pitchFamily="49" charset="0"/>
+              </a:rPr>
+              <a:t>AST</a:t>
+            </a:r>
+            <a:r>
+              <a:rPr lang="en-US" sz="1750" dirty="0"/>
+              <a:t> can be used to check for assignment compatibility.  But method </a:t>
+            </a:r>
+            <a:r>
+              <a:rPr lang="en-US" sz="1750" dirty="0" err="1">
+                <a:latin typeface="Consolas" panose="020B0609020204030204" pitchFamily="49" charset="0"/>
+              </a:rPr>
               <a:t>checkConstraints</a:t>
             </a:r>
             <a:r>
-              <a:rPr lang="en-US" dirty="0"/>
-              <a:t>() becomes complicated when composite types are considered, especially since composite types can be nested. We will revisit type rules for class </a:t>
-            </a:r>
-            <a:r>
-              <a:rPr lang="en-US" dirty="0" err="1"/>
+              <a:rPr lang="en-US" sz="1750" dirty="0">
+                <a:latin typeface="Consolas" panose="020B0609020204030204" pitchFamily="49" charset="0"/>
+              </a:rPr>
+              <a:t>()</a:t>
+            </a:r>
+            <a:r>
+              <a:rPr lang="en-US" sz="1750" dirty="0"/>
+              <a:t> becomes complicated when composite types are considered, especially since composite types can be nested. We will revisit type rules for class </a:t>
+            </a:r>
+            <a:r>
+              <a:rPr lang="en-US" sz="1750" dirty="0" err="1">
+                <a:latin typeface="Consolas" panose="020B0609020204030204" pitchFamily="49" charset="0"/>
+              </a:rPr>
               <a:t>SingleVarDecl</a:t>
             </a:r>
             <a:r>
-              <a:rPr lang="en-US" dirty="0"/>
-              <a:t> in chapters 14, 15, and 16.</a:t>
+              <a:rPr lang="en-US" sz="1750" dirty="0"/>
+              <a:t> in future chapters.</a:t>
             </a:r>
           </a:p>
         </p:txBody>
@@ -9166,7 +9204,17 @@
             </a:r>
             <a:r>
               <a:rPr lang="en-US" dirty="0"/>
-              <a:t> and emit() are complicated by the fact that a variable can be followed by one or more selector expressions.</a:t>
+              <a:t> and </a:t>
+            </a:r>
+            <a:r>
+              <a:rPr lang="en-US" dirty="0">
+                <a:latin typeface="Consolas" panose="020B0609020204030204" pitchFamily="49" charset="0"/>
+              </a:rPr>
+              <a:t>emit()</a:t>
+            </a:r>
+            <a:r>
+              <a:rPr lang="en-US" dirty="0"/>
+              <a:t> are complicated by the fact that a variable can be followed by one or more selector expressions.</a:t>
             </a:r>
           </a:p>
           <a:p>
